--- a/reports/crm/final/deliverables/CRM_Final_Presentation.pptx
+++ b/reports/crm/final/deliverables/CRM_Final_Presentation.pptx
@@ -525,7 +525,7 @@
           <a:p/>
           <a:p>
             <a:r>
-              <a:t>Evidence: reports/crm/final; run 2026-10-06T19:41:05.038515+00:00. Sources: Maven dataset [1]; methods [4–7], references in the paper.</a:t>
+              <a:t>Evidence: reports/crm/final; run 2026-10-10T03:23:13.711211+00:00. Sources: Maven dataset [1]; methods [4–7], references in the paper.</a:t>
             </a:r>
           </a:p>
         </p:txBody>
@@ -607,7 +607,7 @@
           <a:p/>
           <a:p>
             <a:r>
-              <a:t>Evidence: reports/crm/final; run 2026-10-06T19:41:05.038515+00:00. Sources: Maven dataset [1]; methods [4–7], references in the paper.</a:t>
+              <a:t>Evidence: reports/crm/final; run 2026-10-10T03:23:13.711211+00:00. Sources: Maven dataset [1]; methods [4–7], references in the paper.</a:t>
             </a:r>
           </a:p>
         </p:txBody>
@@ -689,7 +689,7 @@
           <a:p/>
           <a:p>
             <a:r>
-              <a:t>Evidence: reports/crm/final; run 2026-10-06T19:41:05.038515+00:00. Sources: Maven dataset [1]; methods [4–7], references in the paper.</a:t>
+              <a:t>Evidence: reports/crm/final; run 2026-10-10T03:23:13.711211+00:00. Sources: Maven dataset [1]; methods [4–7], references in the paper.</a:t>
             </a:r>
           </a:p>
         </p:txBody>
@@ -771,7 +771,7 @@
           <a:p/>
           <a:p>
             <a:r>
-              <a:t>Evidence: reports/crm/final; run 2026-10-06T19:41:05.038515+00:00. Sources: Maven dataset [1]; methods [4–7], references in the paper.</a:t>
+              <a:t>Evidence: reports/crm/final; run 2026-10-10T03:23:13.711211+00:00. Sources: Maven dataset [1]; methods [4–7], references in the paper.</a:t>
             </a:r>
           </a:p>
         </p:txBody>
@@ -853,7 +853,7 @@
           <a:p/>
           <a:p>
             <a:r>
-              <a:t>Evidence: reports/crm/final; run 2026-10-06T19:41:05.038515+00:00. Sources: Maven dataset [1]; methods [4–7], references in the paper.</a:t>
+              <a:t>Evidence: reports/crm/final; run 2026-10-10T03:23:13.711211+00:00. Sources: Maven dataset [1]; methods [4–7], references in the paper.</a:t>
             </a:r>
           </a:p>
         </p:txBody>
@@ -935,7 +935,7 @@
           <a:p/>
           <a:p>
             <a:r>
-              <a:t>Evidence: reports/crm/final; run 2026-10-06T19:41:05.038515+00:00. Sources: Maven dataset [1]; methods [4–7], references in the paper.</a:t>
+              <a:t>Evidence: reports/crm/final; run 2026-10-10T03:23:13.711211+00:00. Sources: Maven dataset [1]; methods [4–7], references in the paper.</a:t>
             </a:r>
           </a:p>
         </p:txBody>
@@ -1017,7 +1017,7 @@
           <a:p/>
           <a:p>
             <a:r>
-              <a:t>Evidence: reports/crm/final; run 2026-10-06T19:41:05.038515+00:00. Sources: Maven dataset [1]; methods [4–7], references in the paper.</a:t>
+              <a:t>Evidence: reports/crm/final; run 2026-10-10T03:23:13.711211+00:00. Sources: Maven dataset [1]; methods [4–7], references in the paper.</a:t>
             </a:r>
           </a:p>
         </p:txBody>
@@ -1099,7 +1099,7 @@
           <a:p/>
           <a:p>
             <a:r>
-              <a:t>Evidence: reports/crm/final; run 2026-10-06T19:41:05.038515+00:00. Sources: Maven dataset [1]; methods [4–7], references in the paper.</a:t>
+              <a:t>Evidence: reports/crm/final; run 2026-10-10T03:23:13.711211+00:00. Sources: Maven dataset [1]; methods [4–7], references in the paper.</a:t>
             </a:r>
           </a:p>
         </p:txBody>
@@ -1181,7 +1181,7 @@
           <a:p/>
           <a:p>
             <a:r>
-              <a:t>Evidence: reports/crm/final; run 2026-10-06T19:41:05.038515+00:00. Sources: Maven dataset [1]; methods [4–7], references in the paper.</a:t>
+              <a:t>Evidence: reports/crm/final; run 2026-10-10T03:23:13.711211+00:00. Sources: Maven dataset [1]; methods [4–7], references in the paper.</a:t>
             </a:r>
           </a:p>
         </p:txBody>
@@ -1263,7 +1263,7 @@
           <a:p/>
           <a:p>
             <a:r>
-              <a:t>Evidence: reports/crm/final; run 2026-10-06T19:41:05.038515+00:00. Sources: Maven dataset [1]; methods [4–7], references in the paper.</a:t>
+              <a:t>Evidence: reports/crm/final; run 2026-10-10T03:23:13.711211+00:00. Sources: Maven dataset [1]; methods [4–7], references in the paper.</a:t>
             </a:r>
           </a:p>
         </p:txBody>
@@ -1345,7 +1345,7 @@
           <a:p/>
           <a:p>
             <a:r>
-              <a:t>Evidence: reports/crm/final; run 2026-10-06T19:41:05.038515+00:00. Sources: Maven dataset [1]; methods [4–7], references in the paper.</a:t>
+              <a:t>Evidence: reports/crm/final; run 2026-10-10T03:23:13.711211+00:00. Sources: Maven dataset [1]; methods [4–7], references in the paper.</a:t>
             </a:r>
           </a:p>
         </p:txBody>
@@ -1427,7 +1427,7 @@
           <a:p/>
           <a:p>
             <a:r>
-              <a:t>Evidence: reports/crm/final; run 2026-10-06T19:41:05.038515+00:00. Sources: Maven dataset [1]; methods [4–7], references in the paper.</a:t>
+              <a:t>Evidence: reports/crm/final; run 2026-10-10T03:23:13.711211+00:00. Sources: Maven dataset [1]; methods [4–7], references in the paper.</a:t>
             </a:r>
           </a:p>
         </p:txBody>
@@ -9385,7 +9385,7 @@
                         </a:defRPr>
                       </a:pPr>
                       <a:r>
-                        <a:t>0.5900</a:t>
+                        <a:t>0.5922</a:t>
                       </a:r>
                     </a:p>
                   </a:txBody>
@@ -9409,7 +9409,7 @@
                         </a:defRPr>
                       </a:pPr>
                       <a:r>
-                        <a:t>0.7388</a:t>
+                        <a:t>0.7422</a:t>
                       </a:r>
                     </a:p>
                   </a:txBody>
@@ -9433,7 +9433,7 @@
                         </a:defRPr>
                       </a:pPr>
                       <a:r>
-                        <a:t>0.5194</a:t>
+                        <a:t>0.5180</a:t>
                       </a:r>
                     </a:p>
                   </a:txBody>
@@ -9457,7 +9457,7 @@
                         </a:defRPr>
                       </a:pPr>
                       <a:r>
-                        <a:t>0.2508</a:t>
+                        <a:t>0.2510</a:t>
                       </a:r>
                     </a:p>
                   </a:txBody>
@@ -9629,7 +9629,7 @@
                         </a:defRPr>
                       </a:pPr>
                       <a:r>
-                        <a:t>0.5628</a:t>
+                        <a:t>0.5356</a:t>
                       </a:r>
                     </a:p>
                   </a:txBody>
@@ -9653,7 +9653,7 @@
                         </a:defRPr>
                       </a:pPr>
                       <a:r>
-                        <a:t>0.6685</a:t>
+                        <a:t>0.6368</a:t>
                       </a:r>
                     </a:p>
                   </a:txBody>
@@ -9677,7 +9677,7 @@
                         </a:defRPr>
                       </a:pPr>
                       <a:r>
-                        <a:t>0.5173</a:t>
+                        <a:t>0.5068</a:t>
                       </a:r>
                     </a:p>
                   </a:txBody>
@@ -9701,7 +9701,7 @@
                         </a:defRPr>
                       </a:pPr>
                       <a:r>
-                        <a:t>0.2468</a:t>
+                        <a:t>0.2490</a:t>
                       </a:r>
                     </a:p>
                   </a:txBody>
